--- a/public/fun/pack/pptx/reviewpro/보장점검양식프리미엄_03_가족점검_세이지크림.pptx
+++ b/public/fun/pack/pptx/reviewpro/보장점검양식프리미엄_03_가족점검_세이지크림.pptx
@@ -112,12 +112,12 @@
   <p:extLst>
     <p:ext uri="{521415D9-36F7-43E2-AB2F-B90AF26B5E84}">
       <p14:sectionLst xmlns:p14="http://schemas.microsoft.com/office/powerpoint/2010/main">
-        <p14:section name="시작" id="{FB5EBF82-4F74-4B48-AD59-5B044931CB60}">
+        <p14:section name="시작" id="{DE00A1B4-4564-4621-91A5-6EB33E491064}">
           <p14:sldIdLst>
             <p14:sldId id="256"/>
           </p14:sldIdLst>
         </p14:section>
-        <p14:section name="본문" id="{5F2FBCCF-8599-4042-B32D-F187C0DFEFD9}">
+        <p14:section name="본문" id="{54CFE267-8DFF-4FA9-BCE4-0AFAA918E4EB}">
           <p14:sldIdLst>
             <p14:sldId id="257"/>
             <p14:sldId id="258"/>
@@ -1560,7 +1560,7 @@
             </a:lvl1pPr>
           </a:lstStyle>
           <a:p>
-            <a:fld id="{13600CFA-1215-4E4B-8E03-5689096442CA}" type="slidenum">
+            <a:fld id="{A4D58EF3-C6D3-4B58-A3EE-6CC63968C46A}" type="slidenum">
               <a:rPr lang="en-US"/>
               <a:t>‹#›</a:t>
             </a:fld>
@@ -2158,7 +2158,7 @@
             </a:lvl1pPr>
           </a:lstStyle>
           <a:p>
-            <a:fld id="{C19CB0A1-DC3C-4980-B7E3-1F9F7B781A85}" type="slidenum">
+            <a:fld id="{B48466AE-8B64-426C-BA22-3F7FD638B517}" type="slidenum">
               <a:rPr lang="en-US"/>
               <a:t>‹#›</a:t>
             </a:fld>
@@ -2747,7 +2747,7 @@
             </a:lvl1pPr>
           </a:lstStyle>
           <a:p>
-            <a:fld id="{CDF0A832-7CA9-41DE-810D-5B918F6E17AE}" type="slidenum">
+            <a:fld id="{03B02349-3BFF-48EF-AEA8-1AD8A29DB609}" type="slidenum">
               <a:rPr lang="en-US"/>
               <a:t>‹#›</a:t>
             </a:fld>
@@ -3550,7 +3550,7 @@
           <a:p>
             <a:r>
               <a:rPr lang="ko-KR"/>
-              <a:t>가족 점검 · 0000. 00. 00</a:t>
+              <a:t>가족 점검 · 날짜 입력</a:t>
             </a:r>
           </a:p>
           <a:p>
@@ -3641,7 +3641,7 @@
           <a:bodyPr/>
           <a:lstStyle/>
           <a:p>
-            <a:fld id="{CA52535C-E454-40A2-AC68-EA08F2130501}" type="slidenum">
+            <a:fld id="{60E6C942-9770-4E91-96C3-1D8A473FE98A}" type="slidenum">
               <a:rPr lang="en-US"/>
               <a:t>‹#›</a:t>
             </a:fld>
@@ -4551,7 +4551,7 @@
           <a:bodyPr/>
           <a:lstStyle/>
           <a:p>
-            <a:fld id="{3AA9379C-EC85-43EA-BAA6-21969DB7AC82}" type="slidenum">
+            <a:fld id="{3C452418-BF7C-4C15-B2D8-6F7A744489DB}" type="slidenum">
               <a:rPr lang="en-US"/>
               <a:t>‹#›</a:t>
             </a:fld>
@@ -6057,7 +6057,7 @@
           <a:bodyPr/>
           <a:lstStyle/>
           <a:p>
-            <a:fld id="{D3992FE6-2A79-413D-8072-2E03D638FC1D}" type="slidenum">
+            <a:fld id="{8287979C-7264-4F4A-B69F-AE93415038F5}" type="slidenum">
               <a:rPr lang="en-US"/>
               <a:t>‹#›</a:t>
             </a:fld>
@@ -7607,7 +7607,7 @@
           <a:bodyPr/>
           <a:lstStyle/>
           <a:p>
-            <a:fld id="{9C5B580D-70C3-462B-B232-430D86347450}" type="slidenum">
+            <a:fld id="{2E837DCE-9822-4709-B0B6-351182582F56}" type="slidenum">
               <a:rPr lang="en-US"/>
               <a:t>‹#›</a:t>
             </a:fld>
@@ -8541,7 +8541,7 @@
           <a:bodyPr/>
           <a:lstStyle/>
           <a:p>
-            <a:fld id="{1F067936-C8CA-4361-80F8-D4B004BD078D}" type="slidenum">
+            <a:fld id="{57F4F914-6F12-468B-8840-16DBC91A5437}" type="slidenum">
               <a:rPr lang="en-US"/>
               <a:t>‹#›</a:t>
             </a:fld>
